--- a/이용매뉴얼/직원-이용매뉴얼.pptx
+++ b/이용매뉴얼/직원-이용매뉴얼.pptx
@@ -5,15 +5,15 @@
     <p:sldMasterId id="2147483648" r:id="rId1"/>
   </p:sldMasterIdLst>
   <p:sldIdLst>
-    <p:sldId id="256" r:id="rId7"/>
-    <p:sldId id="257" r:id="rId8"/>
-    <p:sldId id="258" r:id="rId9"/>
-    <p:sldId id="259" r:id="rId10"/>
-    <p:sldId id="260" r:id="rId11"/>
-    <p:sldId id="261" r:id="rId12"/>
-    <p:sldId id="262" r:id="rId13"/>
+    <p:sldId id="256" r:id="rId2"/>
+    <p:sldId id="257" r:id="rId3"/>
+    <p:sldId id="258" r:id="rId4"/>
+    <p:sldId id="259" r:id="rId5"/>
+    <p:sldId id="260" r:id="rId6"/>
+    <p:sldId id="261" r:id="rId7"/>
+    <p:sldId id="262" r:id="rId8"/>
   </p:sldIdLst>
-  <p:sldSz cx="12191695" cy="6858000" type="screen4x3"/>
+  <p:sldSz cx="12192000" cy="6858000"/>
   <p:notesSz cx="6858000" cy="9144000"/>
   <p:defaultTextStyle>
     <a:defPPr>
@@ -110,6 +110,22 @@
       </a:defRPr>
     </a:lvl9pPr>
   </p:defaultTextStyle>
+  <p:extLst>
+    <p:ext uri="{EFAFB233-063F-42B5-8137-9DF3F51BA10A}">
+      <p15:sldGuideLst xmlns:p15="http://schemas.microsoft.com/office/powerpoint/2012/main">
+        <p15:guide id="1" orient="horz" pos="2160">
+          <p15:clr>
+            <a:srgbClr val="A4A3A4"/>
+          </p15:clr>
+        </p15:guide>
+        <p15:guide id="2" pos="2880">
+          <p15:clr>
+            <a:srgbClr val="A4A3A4"/>
+          </p15:clr>
+        </p15:guide>
+      </p15:sldGuideLst>
+    </p:ext>
+  </p:extLst>
 </p:presentation>
 </file>
 
@@ -151,10 +167,9 @@
           <a:lstStyle/>
           <a:p>
             <a:r>
-              <a:rPr lang="en-US" smtClean="0"/>
+              <a:rPr lang="en-US"/>
               <a:t>Click to edit Master title style</a:t>
             </a:r>
-            <a:endParaRPr lang="en-US"/>
           </a:p>
         </p:txBody>
       </p:sp>
@@ -270,10 +285,9 @@
           </a:lstStyle>
           <a:p>
             <a:r>
-              <a:rPr lang="en-US" smtClean="0"/>
+              <a:rPr lang="en-US"/>
               <a:t>Click to edit Master subtitle style</a:t>
             </a:r>
-            <a:endParaRPr lang="en-US"/>
           </a:p>
         </p:txBody>
       </p:sp>
@@ -294,7 +308,7 @@
           <a:p>
             <a:fld id="{5BCAD085-E8A6-8845-BD4E-CB4CCA059FC4}" type="datetimeFigureOut">
               <a:rPr lang="en-US" smtClean="0"/>
-              <a:t>1/27/13</a:t>
+              <a:t>10/13/2026</a:t>
             </a:fld>
             <a:endParaRPr lang="en-US"/>
           </a:p>
@@ -388,10 +402,9 @@
           <a:lstStyle/>
           <a:p>
             <a:r>
-              <a:rPr lang="en-US" smtClean="0"/>
+              <a:rPr lang="en-US"/>
               <a:t>Click to edit Master title style</a:t>
             </a:r>
-            <a:endParaRPr lang="en-US"/>
           </a:p>
         </p:txBody>
       </p:sp>
@@ -412,38 +425,37 @@
           <a:p>
             <a:pPr lvl="0"/>
             <a:r>
-              <a:rPr lang="en-US" smtClean="0"/>
+              <a:rPr lang="en-US"/>
               <a:t>Click to edit Master text styles</a:t>
             </a:r>
           </a:p>
           <a:p>
             <a:pPr lvl="1"/>
             <a:r>
-              <a:rPr lang="en-US" smtClean="0"/>
+              <a:rPr lang="en-US"/>
               <a:t>Second level</a:t>
             </a:r>
           </a:p>
           <a:p>
             <a:pPr lvl="2"/>
             <a:r>
-              <a:rPr lang="en-US" smtClean="0"/>
+              <a:rPr lang="en-US"/>
               <a:t>Third level</a:t>
             </a:r>
           </a:p>
           <a:p>
             <a:pPr lvl="3"/>
             <a:r>
-              <a:rPr lang="en-US" smtClean="0"/>
+              <a:rPr lang="en-US"/>
               <a:t>Fourth level</a:t>
             </a:r>
           </a:p>
           <a:p>
             <a:pPr lvl="4"/>
             <a:r>
-              <a:rPr lang="en-US" smtClean="0"/>
+              <a:rPr lang="en-US"/>
               <a:t>Fifth level</a:t>
             </a:r>
-            <a:endParaRPr lang="en-US"/>
           </a:p>
         </p:txBody>
       </p:sp>
@@ -464,7 +476,7 @@
           <a:p>
             <a:fld id="{5BCAD085-E8A6-8845-BD4E-CB4CCA059FC4}" type="datetimeFigureOut">
               <a:rPr lang="en-US" smtClean="0"/>
-              <a:t>1/27/13</a:t>
+              <a:t>10/13/2026</a:t>
             </a:fld>
             <a:endParaRPr lang="en-US"/>
           </a:p>
@@ -563,10 +575,9 @@
           <a:lstStyle/>
           <a:p>
             <a:r>
-              <a:rPr lang="en-US" smtClean="0"/>
+              <a:rPr lang="en-US"/>
               <a:t>Click to edit Master title style</a:t>
             </a:r>
-            <a:endParaRPr lang="en-US"/>
           </a:p>
         </p:txBody>
       </p:sp>
@@ -592,38 +603,37 @@
           <a:p>
             <a:pPr lvl="0"/>
             <a:r>
-              <a:rPr lang="en-US" smtClean="0"/>
+              <a:rPr lang="en-US"/>
               <a:t>Click to edit Master text styles</a:t>
             </a:r>
           </a:p>
           <a:p>
             <a:pPr lvl="1"/>
             <a:r>
-              <a:rPr lang="en-US" smtClean="0"/>
+              <a:rPr lang="en-US"/>
               <a:t>Second level</a:t>
             </a:r>
           </a:p>
           <a:p>
             <a:pPr lvl="2"/>
             <a:r>
-              <a:rPr lang="en-US" smtClean="0"/>
+              <a:rPr lang="en-US"/>
               <a:t>Third level</a:t>
             </a:r>
           </a:p>
           <a:p>
             <a:pPr lvl="3"/>
             <a:r>
-              <a:rPr lang="en-US" smtClean="0"/>
+              <a:rPr lang="en-US"/>
               <a:t>Fourth level</a:t>
             </a:r>
           </a:p>
           <a:p>
             <a:pPr lvl="4"/>
             <a:r>
-              <a:rPr lang="en-US" smtClean="0"/>
+              <a:rPr lang="en-US"/>
               <a:t>Fifth level</a:t>
             </a:r>
-            <a:endParaRPr lang="en-US"/>
           </a:p>
         </p:txBody>
       </p:sp>
@@ -644,7 +654,7 @@
           <a:p>
             <a:fld id="{5BCAD085-E8A6-8845-BD4E-CB4CCA059FC4}" type="datetimeFigureOut">
               <a:rPr lang="en-US" smtClean="0"/>
-              <a:t>1/27/13</a:t>
+              <a:t>10/13/2026</a:t>
             </a:fld>
             <a:endParaRPr lang="en-US"/>
           </a:p>
@@ -738,10 +748,9 @@
           <a:lstStyle/>
           <a:p>
             <a:r>
-              <a:rPr lang="en-US" smtClean="0"/>
+              <a:rPr lang="en-US"/>
               <a:t>Click to edit Master title style</a:t>
             </a:r>
-            <a:endParaRPr lang="en-US"/>
           </a:p>
         </p:txBody>
       </p:sp>
@@ -762,38 +771,37 @@
           <a:p>
             <a:pPr lvl="0"/>
             <a:r>
-              <a:rPr lang="en-US" smtClean="0"/>
+              <a:rPr lang="en-US"/>
               <a:t>Click to edit Master text styles</a:t>
             </a:r>
           </a:p>
           <a:p>
             <a:pPr lvl="1"/>
             <a:r>
-              <a:rPr lang="en-US" smtClean="0"/>
+              <a:rPr lang="en-US"/>
               <a:t>Second level</a:t>
             </a:r>
           </a:p>
           <a:p>
             <a:pPr lvl="2"/>
             <a:r>
-              <a:rPr lang="en-US" smtClean="0"/>
+              <a:rPr lang="en-US"/>
               <a:t>Third level</a:t>
             </a:r>
           </a:p>
           <a:p>
             <a:pPr lvl="3"/>
             <a:r>
-              <a:rPr lang="en-US" smtClean="0"/>
+              <a:rPr lang="en-US"/>
               <a:t>Fourth level</a:t>
             </a:r>
           </a:p>
           <a:p>
             <a:pPr lvl="4"/>
             <a:r>
-              <a:rPr lang="en-US" smtClean="0"/>
+              <a:rPr lang="en-US"/>
               <a:t>Fifth level</a:t>
             </a:r>
-            <a:endParaRPr lang="en-US"/>
           </a:p>
         </p:txBody>
       </p:sp>
@@ -814,7 +822,7 @@
           <a:p>
             <a:fld id="{5BCAD085-E8A6-8845-BD4E-CB4CCA059FC4}" type="datetimeFigureOut">
               <a:rPr lang="en-US" smtClean="0"/>
-              <a:t>1/27/13</a:t>
+              <a:t>10/13/2026</a:t>
             </a:fld>
             <a:endParaRPr lang="en-US"/>
           </a:p>
@@ -917,10 +925,9 @@
           </a:lstStyle>
           <a:p>
             <a:r>
-              <a:rPr lang="en-US" smtClean="0"/>
+              <a:rPr lang="en-US"/>
               <a:t>Click to edit Master title style</a:t>
             </a:r>
-            <a:endParaRPr lang="en-US"/>
           </a:p>
         </p:txBody>
       </p:sp>
@@ -1037,7 +1044,7 @@
           <a:p>
             <a:pPr lvl="0"/>
             <a:r>
-              <a:rPr lang="en-US" smtClean="0"/>
+              <a:rPr lang="en-US"/>
               <a:t>Click to edit Master text styles</a:t>
             </a:r>
           </a:p>
@@ -1060,7 +1067,7 @@
           <a:p>
             <a:fld id="{5BCAD085-E8A6-8845-BD4E-CB4CCA059FC4}" type="datetimeFigureOut">
               <a:rPr lang="en-US" smtClean="0"/>
-              <a:t>1/27/13</a:t>
+              <a:t>10/13/2026</a:t>
             </a:fld>
             <a:endParaRPr lang="en-US"/>
           </a:p>
@@ -1154,10 +1161,9 @@
           <a:lstStyle/>
           <a:p>
             <a:r>
-              <a:rPr lang="en-US" smtClean="0"/>
+              <a:rPr lang="en-US"/>
               <a:t>Click to edit Master title style</a:t>
             </a:r>
-            <a:endParaRPr lang="en-US"/>
           </a:p>
         </p:txBody>
       </p:sp>
@@ -1211,38 +1217,37 @@
           <a:p>
             <a:pPr lvl="0"/>
             <a:r>
-              <a:rPr lang="en-US" smtClean="0"/>
+              <a:rPr lang="en-US"/>
               <a:t>Click to edit Master text styles</a:t>
             </a:r>
           </a:p>
           <a:p>
             <a:pPr lvl="1"/>
             <a:r>
-              <a:rPr lang="en-US" smtClean="0"/>
+              <a:rPr lang="en-US"/>
               <a:t>Second level</a:t>
             </a:r>
           </a:p>
           <a:p>
             <a:pPr lvl="2"/>
             <a:r>
-              <a:rPr lang="en-US" smtClean="0"/>
+              <a:rPr lang="en-US"/>
               <a:t>Third level</a:t>
             </a:r>
           </a:p>
           <a:p>
             <a:pPr lvl="3"/>
             <a:r>
-              <a:rPr lang="en-US" smtClean="0"/>
+              <a:rPr lang="en-US"/>
               <a:t>Fourth level</a:t>
             </a:r>
           </a:p>
           <a:p>
             <a:pPr lvl="4"/>
             <a:r>
-              <a:rPr lang="en-US" smtClean="0"/>
+              <a:rPr lang="en-US"/>
               <a:t>Fifth level</a:t>
             </a:r>
-            <a:endParaRPr lang="en-US"/>
           </a:p>
         </p:txBody>
       </p:sp>
@@ -1296,38 +1301,37 @@
           <a:p>
             <a:pPr lvl="0"/>
             <a:r>
-              <a:rPr lang="en-US" smtClean="0"/>
+              <a:rPr lang="en-US"/>
               <a:t>Click to edit Master text styles</a:t>
             </a:r>
           </a:p>
           <a:p>
             <a:pPr lvl="1"/>
             <a:r>
-              <a:rPr lang="en-US" smtClean="0"/>
+              <a:rPr lang="en-US"/>
               <a:t>Second level</a:t>
             </a:r>
           </a:p>
           <a:p>
             <a:pPr lvl="2"/>
             <a:r>
-              <a:rPr lang="en-US" smtClean="0"/>
+              <a:rPr lang="en-US"/>
               <a:t>Third level</a:t>
             </a:r>
           </a:p>
           <a:p>
             <a:pPr lvl="3"/>
             <a:r>
-              <a:rPr lang="en-US" smtClean="0"/>
+              <a:rPr lang="en-US"/>
               <a:t>Fourth level</a:t>
             </a:r>
           </a:p>
           <a:p>
             <a:pPr lvl="4"/>
             <a:r>
-              <a:rPr lang="en-US" smtClean="0"/>
+              <a:rPr lang="en-US"/>
               <a:t>Fifth level</a:t>
             </a:r>
-            <a:endParaRPr lang="en-US"/>
           </a:p>
         </p:txBody>
       </p:sp>
@@ -1348,7 +1352,7 @@
           <a:p>
             <a:fld id="{5BCAD085-E8A6-8845-BD4E-CB4CCA059FC4}" type="datetimeFigureOut">
               <a:rPr lang="en-US" smtClean="0"/>
-              <a:t>1/27/13</a:t>
+              <a:t>10/13/2026</a:t>
             </a:fld>
             <a:endParaRPr lang="en-US"/>
           </a:p>
@@ -1446,10 +1450,9 @@
           </a:lstStyle>
           <a:p>
             <a:r>
-              <a:rPr lang="en-US" smtClean="0"/>
+              <a:rPr lang="en-US"/>
               <a:t>Click to edit Master title style</a:t>
             </a:r>
-            <a:endParaRPr lang="en-US"/>
           </a:p>
         </p:txBody>
       </p:sp>
@@ -1512,7 +1515,7 @@
           <a:p>
             <a:pPr lvl="0"/>
             <a:r>
-              <a:rPr lang="en-US" smtClean="0"/>
+              <a:rPr lang="en-US"/>
               <a:t>Click to edit Master text styles</a:t>
             </a:r>
           </a:p>
@@ -1568,38 +1571,37 @@
           <a:p>
             <a:pPr lvl="0"/>
             <a:r>
-              <a:rPr lang="en-US" smtClean="0"/>
+              <a:rPr lang="en-US"/>
               <a:t>Click to edit Master text styles</a:t>
             </a:r>
           </a:p>
           <a:p>
             <a:pPr lvl="1"/>
             <a:r>
-              <a:rPr lang="en-US" smtClean="0"/>
+              <a:rPr lang="en-US"/>
               <a:t>Second level</a:t>
             </a:r>
           </a:p>
           <a:p>
             <a:pPr lvl="2"/>
             <a:r>
-              <a:rPr lang="en-US" smtClean="0"/>
+              <a:rPr lang="en-US"/>
               <a:t>Third level</a:t>
             </a:r>
           </a:p>
           <a:p>
             <a:pPr lvl="3"/>
             <a:r>
-              <a:rPr lang="en-US" smtClean="0"/>
+              <a:rPr lang="en-US"/>
               <a:t>Fourth level</a:t>
             </a:r>
           </a:p>
           <a:p>
             <a:pPr lvl="4"/>
             <a:r>
-              <a:rPr lang="en-US" smtClean="0"/>
+              <a:rPr lang="en-US"/>
               <a:t>Fifth level</a:t>
             </a:r>
-            <a:endParaRPr lang="en-US"/>
           </a:p>
         </p:txBody>
       </p:sp>
@@ -1662,7 +1664,7 @@
           <a:p>
             <a:pPr lvl="0"/>
             <a:r>
-              <a:rPr lang="en-US" smtClean="0"/>
+              <a:rPr lang="en-US"/>
               <a:t>Click to edit Master text styles</a:t>
             </a:r>
           </a:p>
@@ -1718,38 +1720,37 @@
           <a:p>
             <a:pPr lvl="0"/>
             <a:r>
-              <a:rPr lang="en-US" smtClean="0"/>
+              <a:rPr lang="en-US"/>
               <a:t>Click to edit Master text styles</a:t>
             </a:r>
           </a:p>
           <a:p>
             <a:pPr lvl="1"/>
             <a:r>
-              <a:rPr lang="en-US" smtClean="0"/>
+              <a:rPr lang="en-US"/>
               <a:t>Second level</a:t>
             </a:r>
           </a:p>
           <a:p>
             <a:pPr lvl="2"/>
             <a:r>
-              <a:rPr lang="en-US" smtClean="0"/>
+              <a:rPr lang="en-US"/>
               <a:t>Third level</a:t>
             </a:r>
           </a:p>
           <a:p>
             <a:pPr lvl="3"/>
             <a:r>
-              <a:rPr lang="en-US" smtClean="0"/>
+              <a:rPr lang="en-US"/>
               <a:t>Fourth level</a:t>
             </a:r>
           </a:p>
           <a:p>
             <a:pPr lvl="4"/>
             <a:r>
-              <a:rPr lang="en-US" smtClean="0"/>
+              <a:rPr lang="en-US"/>
               <a:t>Fifth level</a:t>
             </a:r>
-            <a:endParaRPr lang="en-US"/>
           </a:p>
         </p:txBody>
       </p:sp>
@@ -1770,7 +1771,7 @@
           <a:p>
             <a:fld id="{5BCAD085-E8A6-8845-BD4E-CB4CCA059FC4}" type="datetimeFigureOut">
               <a:rPr lang="en-US" smtClean="0"/>
-              <a:t>1/27/13</a:t>
+              <a:t>10/13/2026</a:t>
             </a:fld>
             <a:endParaRPr lang="en-US"/>
           </a:p>
@@ -1864,10 +1865,9 @@
           <a:lstStyle/>
           <a:p>
             <a:r>
-              <a:rPr lang="en-US" smtClean="0"/>
+              <a:rPr lang="en-US"/>
               <a:t>Click to edit Master title style</a:t>
             </a:r>
-            <a:endParaRPr lang="en-US"/>
           </a:p>
         </p:txBody>
       </p:sp>
@@ -1888,7 +1888,7 @@
           <a:p>
             <a:fld id="{5BCAD085-E8A6-8845-BD4E-CB4CCA059FC4}" type="datetimeFigureOut">
               <a:rPr lang="en-US" smtClean="0"/>
-              <a:t>1/27/13</a:t>
+              <a:t>10/13/2026</a:t>
             </a:fld>
             <a:endParaRPr lang="en-US"/>
           </a:p>
@@ -1983,7 +1983,7 @@
           <a:p>
             <a:fld id="{5BCAD085-E8A6-8845-BD4E-CB4CCA059FC4}" type="datetimeFigureOut">
               <a:rPr lang="en-US" smtClean="0"/>
-              <a:t>1/27/13</a:t>
+              <a:t>10/13/2026</a:t>
             </a:fld>
             <a:endParaRPr lang="en-US"/>
           </a:p>
@@ -2086,10 +2086,9 @@
           </a:lstStyle>
           <a:p>
             <a:r>
-              <a:rPr lang="en-US" smtClean="0"/>
+              <a:rPr lang="en-US"/>
               <a:t>Click to edit Master title style</a:t>
             </a:r>
-            <a:endParaRPr lang="en-US"/>
           </a:p>
         </p:txBody>
       </p:sp>
@@ -2143,38 +2142,37 @@
           <a:p>
             <a:pPr lvl="0"/>
             <a:r>
-              <a:rPr lang="en-US" smtClean="0"/>
+              <a:rPr lang="en-US"/>
               <a:t>Click to edit Master text styles</a:t>
             </a:r>
           </a:p>
           <a:p>
             <a:pPr lvl="1"/>
             <a:r>
-              <a:rPr lang="en-US" smtClean="0"/>
+              <a:rPr lang="en-US"/>
               <a:t>Second level</a:t>
             </a:r>
           </a:p>
           <a:p>
             <a:pPr lvl="2"/>
             <a:r>
-              <a:rPr lang="en-US" smtClean="0"/>
+              <a:rPr lang="en-US"/>
               <a:t>Third level</a:t>
             </a:r>
           </a:p>
           <a:p>
             <a:pPr lvl="3"/>
             <a:r>
-              <a:rPr lang="en-US" smtClean="0"/>
+              <a:rPr lang="en-US"/>
               <a:t>Fourth level</a:t>
             </a:r>
           </a:p>
           <a:p>
             <a:pPr lvl="4"/>
             <a:r>
-              <a:rPr lang="en-US" smtClean="0"/>
+              <a:rPr lang="en-US"/>
               <a:t>Fifth level</a:t>
             </a:r>
-            <a:endParaRPr lang="en-US"/>
           </a:p>
         </p:txBody>
       </p:sp>
@@ -2237,7 +2235,7 @@
           <a:p>
             <a:pPr lvl="0"/>
             <a:r>
-              <a:rPr lang="en-US" smtClean="0"/>
+              <a:rPr lang="en-US"/>
               <a:t>Click to edit Master text styles</a:t>
             </a:r>
           </a:p>
@@ -2260,7 +2258,7 @@
           <a:p>
             <a:fld id="{5BCAD085-E8A6-8845-BD4E-CB4CCA059FC4}" type="datetimeFigureOut">
               <a:rPr lang="en-US" smtClean="0"/>
-              <a:t>1/27/13</a:t>
+              <a:t>10/13/2026</a:t>
             </a:fld>
             <a:endParaRPr lang="en-US"/>
           </a:p>
@@ -2363,10 +2361,9 @@
           </a:lstStyle>
           <a:p>
             <a:r>
-              <a:rPr lang="en-US" smtClean="0"/>
+              <a:rPr lang="en-US"/>
               <a:t>Click to edit Master title style</a:t>
             </a:r>
-            <a:endParaRPr lang="en-US"/>
           </a:p>
         </p:txBody>
       </p:sp>
@@ -2490,7 +2487,7 @@
           <a:p>
             <a:pPr lvl="0"/>
             <a:r>
-              <a:rPr lang="en-US" smtClean="0"/>
+              <a:rPr lang="en-US"/>
               <a:t>Click to edit Master text styles</a:t>
             </a:r>
           </a:p>
@@ -2513,7 +2510,7 @@
           <a:p>
             <a:fld id="{5BCAD085-E8A6-8845-BD4E-CB4CCA059FC4}" type="datetimeFigureOut">
               <a:rPr lang="en-US" smtClean="0"/>
-              <a:t>1/27/13</a:t>
+              <a:t>10/13/2026</a:t>
             </a:fld>
             <a:endParaRPr lang="en-US"/>
           </a:p>
@@ -2622,10 +2619,9 @@
           <a:lstStyle/>
           <a:p>
             <a:r>
-              <a:rPr lang="en-US" smtClean="0"/>
+              <a:rPr lang="en-US"/>
               <a:t>Click to edit Master title style</a:t>
             </a:r>
-            <a:endParaRPr lang="en-US"/>
           </a:p>
         </p:txBody>
       </p:sp>
@@ -2656,38 +2652,37 @@
           <a:p>
             <a:pPr lvl="0"/>
             <a:r>
-              <a:rPr lang="en-US" smtClean="0"/>
+              <a:rPr lang="en-US"/>
               <a:t>Click to edit Master text styles</a:t>
             </a:r>
           </a:p>
           <a:p>
             <a:pPr lvl="1"/>
             <a:r>
-              <a:rPr lang="en-US" smtClean="0"/>
+              <a:rPr lang="en-US"/>
               <a:t>Second level</a:t>
             </a:r>
           </a:p>
           <a:p>
             <a:pPr lvl="2"/>
             <a:r>
-              <a:rPr lang="en-US" smtClean="0"/>
+              <a:rPr lang="en-US"/>
               <a:t>Third level</a:t>
             </a:r>
           </a:p>
           <a:p>
             <a:pPr lvl="3"/>
             <a:r>
-              <a:rPr lang="en-US" smtClean="0"/>
+              <a:rPr lang="en-US"/>
               <a:t>Fourth level</a:t>
             </a:r>
           </a:p>
           <a:p>
             <a:pPr lvl="4"/>
             <a:r>
-              <a:rPr lang="en-US" smtClean="0"/>
+              <a:rPr lang="en-US"/>
               <a:t>Fifth level</a:t>
             </a:r>
-            <a:endParaRPr lang="en-US"/>
           </a:p>
         </p:txBody>
       </p:sp>
@@ -2726,7 +2721,7 @@
           <a:p>
             <a:fld id="{5BCAD085-E8A6-8845-BD4E-CB4CCA059FC4}" type="datetimeFigureOut">
               <a:rPr lang="en-US" smtClean="0"/>
-              <a:t>1/27/13</a:t>
+              <a:t>10/13/2026</a:t>
             </a:fld>
             <a:endParaRPr lang="en-US"/>
           </a:p>
@@ -3085,7 +3080,7 @@
 </file>
 
 <file path=ppt/slides/slide1.xml><?xml version="1.0" encoding="utf-8"?>
-<p:sld xmlns:a="http://schemas.openxmlformats.org/drawingml/2006/main" xmlns:p="http://schemas.openxmlformats.org/presentationml/2006/main" xmlns:r="http://schemas.openxmlformats.org/officeDocument/2006/relationships">
+<p:sld xmlns:a="http://schemas.openxmlformats.org/drawingml/2006/main" xmlns:r="http://schemas.openxmlformats.org/officeDocument/2006/relationships" xmlns:p="http://schemas.openxmlformats.org/presentationml/2006/main">
   <p:cSld>
     <p:bg>
       <p:bgPr>
@@ -3101,7 +3096,14 @@
         <p:cNvGrpSpPr/>
         <p:nvPr/>
       </p:nvGrpSpPr>
-      <p:grpSpPr/>
+      <p:grpSpPr>
+        <a:xfrm>
+          <a:off x="0" y="0"/>
+          <a:ext cx="0" cy="0"/>
+          <a:chOff x="0" y="0"/>
+          <a:chExt cx="0" cy="0"/>
+        </a:xfrm>
+      </p:grpSpPr>
       <p:sp>
         <p:nvSpPr>
           <p:cNvPr id="2" name="TextBox 1"/>
@@ -3111,7 +3113,7 @@
         <p:spPr>
           <a:xfrm>
             <a:off x="731520" y="1097280"/>
-            <a:ext cx="10698480" cy="4572000"/>
+            <a:ext cx="10698480" cy="3016210"/>
           </a:xfrm>
           <a:prstGeom prst="rect">
             <a:avLst/>
@@ -3125,13 +3127,22 @@
           <a:lstStyle/>
           <a:p>
             <a:r>
-              <a:rPr sz="1600" b="1">
+              <a:rPr sz="1600" b="1" dirty="0" err="1">
                 <a:solidFill>
                   <a:srgbClr val="0F9D58"/>
                 </a:solidFill>
                 <a:latin typeface="맑은 고딕"/>
               </a:rPr>
-              <a:t>직원용 · STAFF</a:t>
+              <a:t>직원용</a:t>
+            </a:r>
+            <a:r>
+              <a:rPr sz="1600" b="1" dirty="0">
+                <a:solidFill>
+                  <a:srgbClr val="0F9D58"/>
+                </a:solidFill>
+                <a:latin typeface="맑은 고딕"/>
+              </a:rPr>
+              <a:t> · STAFF</a:t>
             </a:r>
           </a:p>
           <a:p>
@@ -3141,15 +3152,93 @@
               </a:spcBef>
             </a:pPr>
             <a:r>
-              <a:rPr sz="4400" b="1">
+              <a:rPr sz="4400" b="1" dirty="0" err="1">
                 <a:solidFill>
                   <a:srgbClr val="FFFFFF"/>
                 </a:solidFill>
                 <a:latin typeface="맑은 고딕"/>
               </a:rPr>
-              <a:t>비젠 인트라넷
-직원 이용 매뉴얼</a:t>
-            </a:r>
+              <a:t>비젠</a:t>
+            </a:r>
+            <a:r>
+              <a:rPr sz="4400" b="1" dirty="0">
+                <a:solidFill>
+                  <a:srgbClr val="FFFFFF"/>
+                </a:solidFill>
+                <a:latin typeface="맑은 고딕"/>
+              </a:rPr>
+              <a:t> </a:t>
+            </a:r>
+            <a:r>
+              <a:rPr sz="4400" b="1" dirty="0" err="1">
+                <a:solidFill>
+                  <a:srgbClr val="FFFFFF"/>
+                </a:solidFill>
+                <a:latin typeface="맑은 고딕"/>
+              </a:rPr>
+              <a:t>인트라넷</a:t>
+            </a:r>
+            <a:r>
+              <a:rPr sz="4400" b="1" dirty="0">
+                <a:solidFill>
+                  <a:srgbClr val="FFFFFF"/>
+                </a:solidFill>
+                <a:latin typeface="맑은 고딕"/>
+              </a:rPr>
+              <a:t>
+</a:t>
+            </a:r>
+            <a:r>
+              <a:rPr sz="4400" b="1" dirty="0" err="1">
+                <a:solidFill>
+                  <a:srgbClr val="FFFFFF"/>
+                </a:solidFill>
+                <a:latin typeface="맑은 고딕"/>
+              </a:rPr>
+              <a:t>직원</a:t>
+            </a:r>
+            <a:r>
+              <a:rPr sz="4400" b="1" dirty="0">
+                <a:solidFill>
+                  <a:srgbClr val="FFFFFF"/>
+                </a:solidFill>
+                <a:latin typeface="맑은 고딕"/>
+              </a:rPr>
+              <a:t> </a:t>
+            </a:r>
+            <a:r>
+              <a:rPr sz="4400" b="1" dirty="0" err="1">
+                <a:solidFill>
+                  <a:srgbClr val="FFFFFF"/>
+                </a:solidFill>
+                <a:latin typeface="맑은 고딕"/>
+              </a:rPr>
+              <a:t>이용</a:t>
+            </a:r>
+            <a:r>
+              <a:rPr sz="4400" b="1" dirty="0">
+                <a:solidFill>
+                  <a:srgbClr val="FFFFFF"/>
+                </a:solidFill>
+                <a:latin typeface="맑은 고딕"/>
+              </a:rPr>
+              <a:t> </a:t>
+            </a:r>
+            <a:r>
+              <a:rPr sz="4400" b="1" dirty="0" err="1">
+                <a:solidFill>
+                  <a:srgbClr val="FFFFFF"/>
+                </a:solidFill>
+                <a:latin typeface="맑은 고딕"/>
+              </a:rPr>
+              <a:t>매뉴얼</a:t>
+            </a:r>
+            <a:endParaRPr sz="4400" b="1" dirty="0">
+              <a:solidFill>
+                <a:srgbClr val="FFFFFF"/>
+              </a:solidFill>
+              <a:latin typeface="맑은 고딕"/>
+            </a:endParaRPr>
           </a:p>
           <a:p>
             <a:pPr>
@@ -3157,14 +3246,45 @@
                 <a:spcPts val="1800"/>
               </a:spcBef>
             </a:pPr>
-            <a:r>
-              <a:rPr sz="1800">
+            <a:endParaRPr lang="en-US" sz="1800" dirty="0">
+              <a:solidFill>
+                <a:srgbClr val="C3CAD6"/>
+              </a:solidFill>
+              <a:latin typeface="맑은 고딕"/>
+            </a:endParaRPr>
+          </a:p>
+          <a:p>
+            <a:pPr>
+              <a:spcBef>
+                <a:spcPts val="1800"/>
+              </a:spcBef>
+            </a:pPr>
+            <a:r>
+              <a:rPr sz="1800" dirty="0">
                 <a:solidFill>
                   <a:srgbClr val="C3CAD6"/>
                 </a:solidFill>
                 <a:latin typeface="맑은 고딕"/>
               </a:rPr>
-              <a:t>처음 쓰는 분도 10분이면 끝나는 그림 설명서  |  버전 1.2 (2026-10-12)</a:t>
+              <a:t>|  </a:t>
+            </a:r>
+            <a:r>
+              <a:rPr sz="1800" dirty="0" err="1">
+                <a:solidFill>
+                  <a:srgbClr val="C3CAD6"/>
+                </a:solidFill>
+                <a:latin typeface="맑은 고딕"/>
+              </a:rPr>
+              <a:t>버전</a:t>
+            </a:r>
+            <a:r>
+              <a:rPr sz="1800" dirty="0">
+                <a:solidFill>
+                  <a:srgbClr val="C3CAD6"/>
+                </a:solidFill>
+                <a:latin typeface="맑은 고딕"/>
+              </a:rPr>
+              <a:t> 1.2 (2026-10-12)</a:t>
             </a:r>
           </a:p>
         </p:txBody>
@@ -3178,7 +3298,7 @@
 </file>
 
 <file path=ppt/slides/slide2.xml><?xml version="1.0" encoding="utf-8"?>
-<p:sld xmlns:a="http://schemas.openxmlformats.org/drawingml/2006/main" xmlns:p="http://schemas.openxmlformats.org/presentationml/2006/main" xmlns:r="http://schemas.openxmlformats.org/officeDocument/2006/relationships">
+<p:sld xmlns:a="http://schemas.openxmlformats.org/drawingml/2006/main" xmlns:r="http://schemas.openxmlformats.org/officeDocument/2006/relationships" xmlns:p="http://schemas.openxmlformats.org/presentationml/2006/main">
   <p:cSld>
     <p:spTree>
       <p:nvGrpSpPr>
@@ -3186,7 +3306,14 @@
         <p:cNvGrpSpPr/>
         <p:nvPr/>
       </p:nvGrpSpPr>
-      <p:grpSpPr/>
+      <p:grpSpPr>
+        <a:xfrm>
+          <a:off x="0" y="0"/>
+          <a:ext cx="0" cy="0"/>
+          <a:chOff x="0" y="0"/>
+          <a:chExt cx="0" cy="0"/>
+        </a:xfrm>
+      </p:grpSpPr>
       <p:sp>
         <p:nvSpPr>
           <p:cNvPr id="2" name="TextBox 1"/>
@@ -3312,7 +3439,7 @@
 </file>
 
 <file path=ppt/slides/slide3.xml><?xml version="1.0" encoding="utf-8"?>
-<p:sld xmlns:a="http://schemas.openxmlformats.org/drawingml/2006/main" xmlns:p="http://schemas.openxmlformats.org/presentationml/2006/main" xmlns:r="http://schemas.openxmlformats.org/officeDocument/2006/relationships">
+<p:sld xmlns:a="http://schemas.openxmlformats.org/drawingml/2006/main" xmlns:r="http://schemas.openxmlformats.org/officeDocument/2006/relationships" xmlns:p="http://schemas.openxmlformats.org/presentationml/2006/main">
   <p:cSld>
     <p:spTree>
       <p:nvGrpSpPr>
@@ -3320,7 +3447,14 @@
         <p:cNvGrpSpPr/>
         <p:nvPr/>
       </p:nvGrpSpPr>
-      <p:grpSpPr/>
+      <p:grpSpPr>
+        <a:xfrm>
+          <a:off x="0" y="0"/>
+          <a:ext cx="0" cy="0"/>
+          <a:chOff x="0" y="0"/>
+          <a:chExt cx="0" cy="0"/>
+        </a:xfrm>
+      </p:grpSpPr>
       <p:sp>
         <p:nvSpPr>
           <p:cNvPr id="2" name="TextBox 1"/>
@@ -3547,7 +3681,7 @@
 </file>
 
 <file path=ppt/slides/slide4.xml><?xml version="1.0" encoding="utf-8"?>
-<p:sld xmlns:a="http://schemas.openxmlformats.org/drawingml/2006/main" xmlns:p="http://schemas.openxmlformats.org/presentationml/2006/main" xmlns:r="http://schemas.openxmlformats.org/officeDocument/2006/relationships">
+<p:sld xmlns:a="http://schemas.openxmlformats.org/drawingml/2006/main" xmlns:r="http://schemas.openxmlformats.org/officeDocument/2006/relationships" xmlns:p="http://schemas.openxmlformats.org/presentationml/2006/main">
   <p:cSld>
     <p:spTree>
       <p:nvGrpSpPr>
@@ -3555,7 +3689,14 @@
         <p:cNvGrpSpPr/>
         <p:nvPr/>
       </p:nvGrpSpPr>
-      <p:grpSpPr/>
+      <p:grpSpPr>
+        <a:xfrm>
+          <a:off x="0" y="0"/>
+          <a:ext cx="0" cy="0"/>
+          <a:chOff x="0" y="0"/>
+          <a:chExt cx="0" cy="0"/>
+        </a:xfrm>
+      </p:grpSpPr>
       <p:sp>
         <p:nvSpPr>
           <p:cNvPr id="2" name="TextBox 1"/>
@@ -3782,7 +3923,7 @@
 </file>
 
 <file path=ppt/slides/slide5.xml><?xml version="1.0" encoding="utf-8"?>
-<p:sld xmlns:a="http://schemas.openxmlformats.org/drawingml/2006/main" xmlns:p="http://schemas.openxmlformats.org/presentationml/2006/main" xmlns:r="http://schemas.openxmlformats.org/officeDocument/2006/relationships">
+<p:sld xmlns:a="http://schemas.openxmlformats.org/drawingml/2006/main" xmlns:r="http://schemas.openxmlformats.org/officeDocument/2006/relationships" xmlns:p="http://schemas.openxmlformats.org/presentationml/2006/main">
   <p:cSld>
     <p:spTree>
       <p:nvGrpSpPr>
@@ -3790,7 +3931,14 @@
         <p:cNvGrpSpPr/>
         <p:nvPr/>
       </p:nvGrpSpPr>
-      <p:grpSpPr/>
+      <p:grpSpPr>
+        <a:xfrm>
+          <a:off x="0" y="0"/>
+          <a:ext cx="0" cy="0"/>
+          <a:chOff x="0" y="0"/>
+          <a:chExt cx="0" cy="0"/>
+        </a:xfrm>
+      </p:grpSpPr>
       <p:sp>
         <p:nvSpPr>
           <p:cNvPr id="2" name="TextBox 1"/>
@@ -3958,7 +4106,7 @@
 </file>
 
 <file path=ppt/slides/slide6.xml><?xml version="1.0" encoding="utf-8"?>
-<p:sld xmlns:a="http://schemas.openxmlformats.org/drawingml/2006/main" xmlns:p="http://schemas.openxmlformats.org/presentationml/2006/main" xmlns:r="http://schemas.openxmlformats.org/officeDocument/2006/relationships">
+<p:sld xmlns:a="http://schemas.openxmlformats.org/drawingml/2006/main" xmlns:r="http://schemas.openxmlformats.org/officeDocument/2006/relationships" xmlns:p="http://schemas.openxmlformats.org/presentationml/2006/main">
   <p:cSld>
     <p:spTree>
       <p:nvGrpSpPr>
@@ -3966,7 +4114,14 @@
         <p:cNvGrpSpPr/>
         <p:nvPr/>
       </p:nvGrpSpPr>
-      <p:grpSpPr/>
+      <p:grpSpPr>
+        <a:xfrm>
+          <a:off x="0" y="0"/>
+          <a:ext cx="0" cy="0"/>
+          <a:chOff x="0" y="0"/>
+          <a:chExt cx="0" cy="0"/>
+        </a:xfrm>
+      </p:grpSpPr>
       <p:sp>
         <p:nvSpPr>
           <p:cNvPr id="2" name="TextBox 1"/>
@@ -4000,15 +4155,12 @@
             </a:r>
           </a:p>
           <a:p>
-            <a:r>
-              <a:rPr sz="1600">
-                <a:solidFill>
-                  <a:srgbClr val="4A5568"/>
-                </a:solidFill>
-                <a:latin typeface="맑은 고딕"/>
-              </a:rPr>
-              <a:t/>
-            </a:r>
+            <a:endParaRPr sz="3400" b="1">
+              <a:solidFill>
+                <a:srgbClr val="0F9D58"/>
+              </a:solidFill>
+              <a:latin typeface="맑은 고딕"/>
+            </a:endParaRPr>
           </a:p>
         </p:txBody>
       </p:sp>
@@ -4040,23 +4192,200 @@
               </a:spcAft>
             </a:pPr>
             <a:r>
-              <a:rPr sz="2000" b="1">
+              <a:rPr sz="2000" b="1" dirty="0" err="1">
                 <a:solidFill>
                   <a:srgbClr val="1A37C4"/>
                 </a:solidFill>
                 <a:latin typeface="맑은 고딕"/>
               </a:rPr>
-              <a:t>프로젝트:  </a:t>
-            </a:r>
-            <a:r>
-              <a:rPr sz="2000">
-                <a:solidFill>
-                  <a:srgbClr val="1B2436"/>
-                </a:solidFill>
-                <a:latin typeface="맑은 고딕"/>
-              </a:rPr>
-              <a:t>카드 클릭 → 내역 확인. 등록·수정은 직접 가능, 삭제는 관리자에게 요청</a:t>
-            </a:r>
+              <a:t>프로젝트</a:t>
+            </a:r>
+            <a:r>
+              <a:rPr sz="2000" b="1" dirty="0">
+                <a:solidFill>
+                  <a:srgbClr val="1A37C4"/>
+                </a:solidFill>
+                <a:latin typeface="맑은 고딕"/>
+              </a:rPr>
+              <a:t>:  </a:t>
+            </a:r>
+            <a:r>
+              <a:rPr sz="2000" dirty="0" err="1">
+                <a:solidFill>
+                  <a:srgbClr val="1B2436"/>
+                </a:solidFill>
+                <a:latin typeface="맑은 고딕"/>
+              </a:rPr>
+              <a:t>카드</a:t>
+            </a:r>
+            <a:r>
+              <a:rPr sz="2000" dirty="0">
+                <a:solidFill>
+                  <a:srgbClr val="1B2436"/>
+                </a:solidFill>
+                <a:latin typeface="맑은 고딕"/>
+              </a:rPr>
+              <a:t> </a:t>
+            </a:r>
+            <a:r>
+              <a:rPr sz="2000" dirty="0" err="1">
+                <a:solidFill>
+                  <a:srgbClr val="1B2436"/>
+                </a:solidFill>
+                <a:latin typeface="맑은 고딕"/>
+              </a:rPr>
+              <a:t>클릭</a:t>
+            </a:r>
+            <a:r>
+              <a:rPr sz="2000" dirty="0">
+                <a:solidFill>
+                  <a:srgbClr val="1B2436"/>
+                </a:solidFill>
+                <a:latin typeface="맑은 고딕"/>
+              </a:rPr>
+              <a:t> → </a:t>
+            </a:r>
+            <a:r>
+              <a:rPr sz="2000" dirty="0" err="1">
+                <a:solidFill>
+                  <a:srgbClr val="1B2436"/>
+                </a:solidFill>
+                <a:latin typeface="맑은 고딕"/>
+              </a:rPr>
+              <a:t>내역</a:t>
+            </a:r>
+            <a:r>
+              <a:rPr sz="2000" dirty="0">
+                <a:solidFill>
+                  <a:srgbClr val="1B2436"/>
+                </a:solidFill>
+                <a:latin typeface="맑은 고딕"/>
+              </a:rPr>
+              <a:t> </a:t>
+            </a:r>
+            <a:r>
+              <a:rPr sz="2000" dirty="0" err="1">
+                <a:solidFill>
+                  <a:srgbClr val="1B2436"/>
+                </a:solidFill>
+                <a:latin typeface="맑은 고딕"/>
+              </a:rPr>
+              <a:t>확인</a:t>
+            </a:r>
+            <a:r>
+              <a:rPr sz="2000" dirty="0">
+                <a:solidFill>
+                  <a:srgbClr val="1B2436"/>
+                </a:solidFill>
+                <a:latin typeface="맑은 고딕"/>
+              </a:rPr>
+              <a:t>. </a:t>
+            </a:r>
+            <a:r>
+              <a:rPr sz="2000" dirty="0" err="1">
+                <a:solidFill>
+                  <a:srgbClr val="1B2436"/>
+                </a:solidFill>
+                <a:latin typeface="맑은 고딕"/>
+              </a:rPr>
+              <a:t>등록·수정은</a:t>
+            </a:r>
+            <a:r>
+              <a:rPr sz="2000" dirty="0">
+                <a:solidFill>
+                  <a:srgbClr val="1B2436"/>
+                </a:solidFill>
+                <a:latin typeface="맑은 고딕"/>
+              </a:rPr>
+              <a:t> </a:t>
+            </a:r>
+            <a:r>
+              <a:rPr sz="2000" dirty="0" err="1">
+                <a:solidFill>
+                  <a:srgbClr val="1B2436"/>
+                </a:solidFill>
+                <a:latin typeface="맑은 고딕"/>
+              </a:rPr>
+              <a:t>직접</a:t>
+            </a:r>
+            <a:r>
+              <a:rPr sz="2000" dirty="0">
+                <a:solidFill>
+                  <a:srgbClr val="1B2436"/>
+                </a:solidFill>
+                <a:latin typeface="맑은 고딕"/>
+              </a:rPr>
+              <a:t> </a:t>
+            </a:r>
+            <a:r>
+              <a:rPr sz="2000" dirty="0" err="1">
+                <a:solidFill>
+                  <a:srgbClr val="1B2436"/>
+                </a:solidFill>
+                <a:latin typeface="맑은 고딕"/>
+              </a:rPr>
+              <a:t>가능</a:t>
+            </a:r>
+            <a:r>
+              <a:rPr sz="2000" dirty="0">
+                <a:solidFill>
+                  <a:srgbClr val="1B2436"/>
+                </a:solidFill>
+                <a:latin typeface="맑은 고딕"/>
+              </a:rPr>
+              <a:t>, </a:t>
+            </a:r>
+            <a:r>
+              <a:rPr sz="2000" dirty="0" err="1">
+                <a:solidFill>
+                  <a:srgbClr val="1B2436"/>
+                </a:solidFill>
+                <a:latin typeface="맑은 고딕"/>
+              </a:rPr>
+              <a:t>삭제는</a:t>
+            </a:r>
+            <a:r>
+              <a:rPr sz="2000" dirty="0">
+                <a:solidFill>
+                  <a:srgbClr val="1B2436"/>
+                </a:solidFill>
+                <a:latin typeface="맑은 고딕"/>
+              </a:rPr>
+              <a:t> </a:t>
+            </a:r>
+            <a:r>
+              <a:rPr sz="2000" dirty="0" err="1">
+                <a:solidFill>
+                  <a:srgbClr val="1B2436"/>
+                </a:solidFill>
+                <a:latin typeface="맑은 고딕"/>
+              </a:rPr>
+              <a:t>관리자에게</a:t>
+            </a:r>
+            <a:r>
+              <a:rPr sz="2000" dirty="0">
+                <a:solidFill>
+                  <a:srgbClr val="1B2436"/>
+                </a:solidFill>
+                <a:latin typeface="맑은 고딕"/>
+              </a:rPr>
+              <a:t> </a:t>
+            </a:r>
+            <a:r>
+              <a:rPr sz="2000" dirty="0" err="1">
+                <a:solidFill>
+                  <a:srgbClr val="1B2436"/>
+                </a:solidFill>
+                <a:latin typeface="맑은 고딕"/>
+              </a:rPr>
+              <a:t>요청</a:t>
+            </a:r>
+            <a:endParaRPr sz="2000" dirty="0">
+              <a:solidFill>
+                <a:srgbClr val="1B2436"/>
+              </a:solidFill>
+              <a:latin typeface="맑은 고딕"/>
+            </a:endParaRPr>
           </a:p>
           <a:p>
             <a:pPr>
@@ -4065,23 +4394,110 @@
               </a:spcAft>
             </a:pPr>
             <a:r>
-              <a:rPr sz="2000" b="1">
+              <a:rPr sz="2000" b="1" dirty="0" err="1">
                 <a:solidFill>
                   <a:srgbClr val="1A37C4"/>
                 </a:solidFill>
                 <a:latin typeface="맑은 고딕"/>
               </a:rPr>
-              <a:t>거래처:  </a:t>
-            </a:r>
-            <a:r>
-              <a:rPr sz="2000">
-                <a:solidFill>
-                  <a:srgbClr val="1B2436"/>
-                </a:solidFill>
-                <a:latin typeface="맑은 고딕"/>
-              </a:rPr>
-              <a:t>검색 → 등록·수정 가능, 삭제는 요청</a:t>
-            </a:r>
+              <a:t>거래처</a:t>
+            </a:r>
+            <a:r>
+              <a:rPr sz="2000" b="1" dirty="0">
+                <a:solidFill>
+                  <a:srgbClr val="1A37C4"/>
+                </a:solidFill>
+                <a:latin typeface="맑은 고딕"/>
+              </a:rPr>
+              <a:t>:  </a:t>
+            </a:r>
+            <a:r>
+              <a:rPr sz="2000" dirty="0" err="1">
+                <a:solidFill>
+                  <a:srgbClr val="1B2436"/>
+                </a:solidFill>
+                <a:latin typeface="맑은 고딕"/>
+              </a:rPr>
+              <a:t>검색</a:t>
+            </a:r>
+            <a:r>
+              <a:rPr sz="2000" dirty="0">
+                <a:solidFill>
+                  <a:srgbClr val="1B2436"/>
+                </a:solidFill>
+                <a:latin typeface="맑은 고딕"/>
+              </a:rPr>
+              <a:t> → </a:t>
+            </a:r>
+            <a:r>
+              <a:rPr sz="2000" dirty="0" err="1">
+                <a:solidFill>
+                  <a:srgbClr val="1B2436"/>
+                </a:solidFill>
+                <a:latin typeface="맑은 고딕"/>
+              </a:rPr>
+              <a:t>등록·수정</a:t>
+            </a:r>
+            <a:r>
+              <a:rPr sz="2000" dirty="0">
+                <a:solidFill>
+                  <a:srgbClr val="1B2436"/>
+                </a:solidFill>
+                <a:latin typeface="맑은 고딕"/>
+              </a:rPr>
+              <a:t> </a:t>
+            </a:r>
+            <a:r>
+              <a:rPr sz="2000" dirty="0" err="1">
+                <a:solidFill>
+                  <a:srgbClr val="1B2436"/>
+                </a:solidFill>
+                <a:latin typeface="맑은 고딕"/>
+              </a:rPr>
+              <a:t>가능</a:t>
+            </a:r>
+            <a:r>
+              <a:rPr sz="2000" dirty="0">
+                <a:solidFill>
+                  <a:srgbClr val="1B2436"/>
+                </a:solidFill>
+                <a:latin typeface="맑은 고딕"/>
+              </a:rPr>
+              <a:t>, </a:t>
+            </a:r>
+            <a:r>
+              <a:rPr sz="2000" dirty="0" err="1">
+                <a:solidFill>
+                  <a:srgbClr val="1B2436"/>
+                </a:solidFill>
+                <a:latin typeface="맑은 고딕"/>
+              </a:rPr>
+              <a:t>삭제는</a:t>
+            </a:r>
+            <a:r>
+              <a:rPr sz="2000" dirty="0">
+                <a:solidFill>
+                  <a:srgbClr val="1B2436"/>
+                </a:solidFill>
+                <a:latin typeface="맑은 고딕"/>
+              </a:rPr>
+              <a:t> </a:t>
+            </a:r>
+            <a:r>
+              <a:rPr sz="2000" dirty="0" err="1">
+                <a:solidFill>
+                  <a:srgbClr val="1B2436"/>
+                </a:solidFill>
+                <a:latin typeface="맑은 고딕"/>
+              </a:rPr>
+              <a:t>요청</a:t>
+            </a:r>
+            <a:endParaRPr sz="2000" dirty="0">
+              <a:solidFill>
+                <a:srgbClr val="1B2436"/>
+              </a:solidFill>
+              <a:latin typeface="맑은 고딕"/>
+            </a:endParaRPr>
           </a:p>
           <a:p>
             <a:pPr>
@@ -4090,23 +4506,209 @@
               </a:spcAft>
             </a:pPr>
             <a:r>
-              <a:rPr sz="2000" b="1">
+              <a:rPr sz="2000" b="1" dirty="0" err="1">
                 <a:solidFill>
                   <a:srgbClr val="1A37C4"/>
                 </a:solidFill>
                 <a:latin typeface="맑은 고딕"/>
               </a:rPr>
-              <a:t>휴무:  </a:t>
-            </a:r>
-            <a:r>
-              <a:rPr sz="2000">
-                <a:solidFill>
-                  <a:srgbClr val="1B2436"/>
-                </a:solidFill>
-                <a:latin typeface="맑은 고딕"/>
-              </a:rPr>
-              <a:t>[휴무 등록] → 종류·날짜·사유 → 승인/반려 확인. 주말출근 신청 시 대휴 자동계산</a:t>
-            </a:r>
+              <a:t>휴무</a:t>
+            </a:r>
+            <a:r>
+              <a:rPr sz="2000" b="1" dirty="0">
+                <a:solidFill>
+                  <a:srgbClr val="1A37C4"/>
+                </a:solidFill>
+                <a:latin typeface="맑은 고딕"/>
+              </a:rPr>
+              <a:t>:  </a:t>
+            </a:r>
+            <a:r>
+              <a:rPr sz="2000" dirty="0">
+                <a:solidFill>
+                  <a:srgbClr val="1B2436"/>
+                </a:solidFill>
+                <a:latin typeface="맑은 고딕"/>
+              </a:rPr>
+              <a:t>[</a:t>
+            </a:r>
+            <a:r>
+              <a:rPr sz="2000" dirty="0" err="1">
+                <a:solidFill>
+                  <a:srgbClr val="1B2436"/>
+                </a:solidFill>
+                <a:latin typeface="맑은 고딕"/>
+              </a:rPr>
+              <a:t>휴무</a:t>
+            </a:r>
+            <a:r>
+              <a:rPr sz="2000" dirty="0">
+                <a:solidFill>
+                  <a:srgbClr val="1B2436"/>
+                </a:solidFill>
+                <a:latin typeface="맑은 고딕"/>
+              </a:rPr>
+              <a:t> </a:t>
+            </a:r>
+            <a:r>
+              <a:rPr sz="2000" dirty="0" err="1">
+                <a:solidFill>
+                  <a:srgbClr val="1B2436"/>
+                </a:solidFill>
+                <a:latin typeface="맑은 고딕"/>
+              </a:rPr>
+              <a:t>등록</a:t>
+            </a:r>
+            <a:r>
+              <a:rPr sz="2000" dirty="0">
+                <a:solidFill>
+                  <a:srgbClr val="1B2436"/>
+                </a:solidFill>
+                <a:latin typeface="맑은 고딕"/>
+              </a:rPr>
+              <a:t>] → </a:t>
+            </a:r>
+            <a:r>
+              <a:rPr sz="2000" dirty="0" err="1">
+                <a:solidFill>
+                  <a:srgbClr val="1B2436"/>
+                </a:solidFill>
+                <a:latin typeface="맑은 고딕"/>
+              </a:rPr>
+              <a:t>종류·날짜·사유</a:t>
+            </a:r>
+            <a:r>
+              <a:rPr sz="2000" dirty="0">
+                <a:solidFill>
+                  <a:srgbClr val="1B2436"/>
+                </a:solidFill>
+                <a:latin typeface="맑은 고딕"/>
+              </a:rPr>
+              <a:t> → </a:t>
+            </a:r>
+            <a:r>
+              <a:rPr sz="2000" dirty="0" err="1">
+                <a:solidFill>
+                  <a:srgbClr val="1B2436"/>
+                </a:solidFill>
+                <a:latin typeface="맑은 고딕"/>
+              </a:rPr>
+              <a:t>승인</a:t>
+            </a:r>
+            <a:r>
+              <a:rPr sz="2000" dirty="0">
+                <a:solidFill>
+                  <a:srgbClr val="1B2436"/>
+                </a:solidFill>
+                <a:latin typeface="맑은 고딕"/>
+              </a:rPr>
+              <a:t>/</a:t>
+            </a:r>
+            <a:r>
+              <a:rPr sz="2000" dirty="0" err="1">
+                <a:solidFill>
+                  <a:srgbClr val="1B2436"/>
+                </a:solidFill>
+                <a:latin typeface="맑은 고딕"/>
+              </a:rPr>
+              <a:t>반려</a:t>
+            </a:r>
+            <a:r>
+              <a:rPr sz="2000" dirty="0">
+                <a:solidFill>
+                  <a:srgbClr val="1B2436"/>
+                </a:solidFill>
+                <a:latin typeface="맑은 고딕"/>
+              </a:rPr>
+              <a:t> </a:t>
+            </a:r>
+            <a:r>
+              <a:rPr sz="2000" dirty="0" err="1">
+                <a:solidFill>
+                  <a:srgbClr val="1B2436"/>
+                </a:solidFill>
+                <a:latin typeface="맑은 고딕"/>
+              </a:rPr>
+              <a:t>확인</a:t>
+            </a:r>
+            <a:r>
+              <a:rPr sz="2000" dirty="0">
+                <a:solidFill>
+                  <a:srgbClr val="1B2436"/>
+                </a:solidFill>
+                <a:latin typeface="맑은 고딕"/>
+              </a:rPr>
+              <a:t>. </a:t>
+            </a:r>
+            <a:r>
+              <a:rPr sz="2000" dirty="0" err="1">
+                <a:solidFill>
+                  <a:srgbClr val="1B2436"/>
+                </a:solidFill>
+                <a:latin typeface="맑은 고딕"/>
+              </a:rPr>
+              <a:t>주말출근</a:t>
+            </a:r>
+            <a:r>
+              <a:rPr sz="2000" dirty="0">
+                <a:solidFill>
+                  <a:srgbClr val="1B2436"/>
+                </a:solidFill>
+                <a:latin typeface="맑은 고딕"/>
+              </a:rPr>
+              <a:t> </a:t>
+            </a:r>
+            <a:r>
+              <a:rPr sz="2000" dirty="0" err="1">
+                <a:solidFill>
+                  <a:srgbClr val="1B2436"/>
+                </a:solidFill>
+                <a:latin typeface="맑은 고딕"/>
+              </a:rPr>
+              <a:t>신청</a:t>
+            </a:r>
+            <a:r>
+              <a:rPr sz="2000" dirty="0">
+                <a:solidFill>
+                  <a:srgbClr val="1B2436"/>
+                </a:solidFill>
+                <a:latin typeface="맑은 고딕"/>
+              </a:rPr>
+              <a:t> 시 </a:t>
+            </a:r>
+            <a:r>
+              <a:rPr sz="2000" dirty="0" err="1">
+                <a:solidFill>
+                  <a:srgbClr val="1B2436"/>
+                </a:solidFill>
+                <a:latin typeface="맑은 고딕"/>
+              </a:rPr>
+              <a:t>대휴</a:t>
+            </a:r>
+            <a:r>
+              <a:rPr sz="2000" dirty="0">
+                <a:solidFill>
+                  <a:srgbClr val="1B2436"/>
+                </a:solidFill>
+                <a:latin typeface="맑은 고딕"/>
+              </a:rPr>
+              <a:t> </a:t>
+            </a:r>
+            <a:r>
+              <a:rPr sz="2000" dirty="0" err="1">
+                <a:solidFill>
+                  <a:srgbClr val="1B2436"/>
+                </a:solidFill>
+                <a:latin typeface="맑은 고딕"/>
+              </a:rPr>
+              <a:t>자동계산</a:t>
+            </a:r>
+            <a:endParaRPr sz="2000" dirty="0">
+              <a:solidFill>
+                <a:srgbClr val="1B2436"/>
+              </a:solidFill>
+              <a:latin typeface="맑은 고딕"/>
+            </a:endParaRPr>
           </a:p>
           <a:p>
             <a:pPr>
@@ -4115,23 +4717,92 @@
               </a:spcAft>
             </a:pPr>
             <a:r>
-              <a:rPr sz="2000" b="1">
+              <a:rPr sz="2000" b="1" dirty="0" err="1">
                 <a:solidFill>
                   <a:srgbClr val="1A37C4"/>
                 </a:solidFill>
                 <a:latin typeface="맑은 고딕"/>
               </a:rPr>
-              <a:t>설정:  </a:t>
-            </a:r>
-            <a:r>
-              <a:rPr sz="2000">
-                <a:solidFill>
-                  <a:srgbClr val="1B2436"/>
-                </a:solidFill>
-                <a:latin typeface="맑은 고딕"/>
-              </a:rPr>
-              <a:t>이름·부서·전화 수정, 비밀번호 변경·로그아웃</a:t>
-            </a:r>
+              <a:t>설정</a:t>
+            </a:r>
+            <a:r>
+              <a:rPr sz="2000" b="1" dirty="0">
+                <a:solidFill>
+                  <a:srgbClr val="1A37C4"/>
+                </a:solidFill>
+                <a:latin typeface="맑은 고딕"/>
+              </a:rPr>
+              <a:t>:  </a:t>
+            </a:r>
+            <a:r>
+              <a:rPr sz="2000" dirty="0" err="1">
+                <a:solidFill>
+                  <a:srgbClr val="1B2436"/>
+                </a:solidFill>
+                <a:latin typeface="맑은 고딕"/>
+              </a:rPr>
+              <a:t>이름·부서·전화</a:t>
+            </a:r>
+            <a:r>
+              <a:rPr sz="2000" dirty="0">
+                <a:solidFill>
+                  <a:srgbClr val="1B2436"/>
+                </a:solidFill>
+                <a:latin typeface="맑은 고딕"/>
+              </a:rPr>
+              <a:t> </a:t>
+            </a:r>
+            <a:r>
+              <a:rPr sz="2000" dirty="0" err="1">
+                <a:solidFill>
+                  <a:srgbClr val="1B2436"/>
+                </a:solidFill>
+                <a:latin typeface="맑은 고딕"/>
+              </a:rPr>
+              <a:t>수정</a:t>
+            </a:r>
+            <a:r>
+              <a:rPr sz="2000" dirty="0">
+                <a:solidFill>
+                  <a:srgbClr val="1B2436"/>
+                </a:solidFill>
+                <a:latin typeface="맑은 고딕"/>
+              </a:rPr>
+              <a:t>, </a:t>
+            </a:r>
+            <a:r>
+              <a:rPr sz="2000" dirty="0" err="1">
+                <a:solidFill>
+                  <a:srgbClr val="1B2436"/>
+                </a:solidFill>
+                <a:latin typeface="맑은 고딕"/>
+              </a:rPr>
+              <a:t>비밀번호</a:t>
+            </a:r>
+            <a:r>
+              <a:rPr sz="2000" dirty="0">
+                <a:solidFill>
+                  <a:srgbClr val="1B2436"/>
+                </a:solidFill>
+                <a:latin typeface="맑은 고딕"/>
+              </a:rPr>
+              <a:t> </a:t>
+            </a:r>
+            <a:r>
+              <a:rPr sz="2000" dirty="0" err="1">
+                <a:solidFill>
+                  <a:srgbClr val="1B2436"/>
+                </a:solidFill>
+                <a:latin typeface="맑은 고딕"/>
+              </a:rPr>
+              <a:t>변경·로그아웃</a:t>
+            </a:r>
+            <a:endParaRPr sz="2000" dirty="0">
+              <a:solidFill>
+                <a:srgbClr val="1B2436"/>
+              </a:solidFill>
+              <a:latin typeface="맑은 고딕"/>
+            </a:endParaRPr>
           </a:p>
         </p:txBody>
       </p:sp>
@@ -4144,7 +4815,7 @@
 </file>
 
 <file path=ppt/slides/slide7.xml><?xml version="1.0" encoding="utf-8"?>
-<p:sld xmlns:a="http://schemas.openxmlformats.org/drawingml/2006/main" xmlns:p="http://schemas.openxmlformats.org/presentationml/2006/main" xmlns:r="http://schemas.openxmlformats.org/officeDocument/2006/relationships">
+<p:sld xmlns:a="http://schemas.openxmlformats.org/drawingml/2006/main" xmlns:r="http://schemas.openxmlformats.org/officeDocument/2006/relationships" xmlns:p="http://schemas.openxmlformats.org/presentationml/2006/main">
   <p:cSld>
     <p:spTree>
       <p:nvGrpSpPr>
@@ -4152,7 +4823,14 @@
         <p:cNvGrpSpPr/>
         <p:nvPr/>
       </p:nvGrpSpPr>
-      <p:grpSpPr/>
+      <p:grpSpPr>
+        <a:xfrm>
+          <a:off x="0" y="0"/>
+          <a:ext cx="0" cy="0"/>
+          <a:chOff x="0" y="0"/>
+          <a:chExt cx="0" cy="0"/>
+        </a:xfrm>
+      </p:grpSpPr>
       <p:sp>
         <p:nvSpPr>
           <p:cNvPr id="2" name="TextBox 1"/>
@@ -4186,15 +4864,12 @@
             </a:r>
           </a:p>
           <a:p>
-            <a:r>
-              <a:rPr sz="1600">
-                <a:solidFill>
-                  <a:srgbClr val="4A5568"/>
-                </a:solidFill>
-                <a:latin typeface="맑은 고딕"/>
-              </a:rPr>
-              <a:t/>
-            </a:r>
+            <a:endParaRPr sz="3400" b="1">
+              <a:solidFill>
+                <a:srgbClr val="0F9D58"/>
+              </a:solidFill>
+              <a:latin typeface="맑은 고딕"/>
+            </a:endParaRPr>
           </a:p>
         </p:txBody>
       </p:sp>
